--- a/examples/pm8_delete_csp/delete_csp_guide.pptx
+++ b/examples/pm8_delete_csp/delete_csp_guide.pptx
@@ -591,9 +591,7 @@
               <a:t>NOTE_CONTENT_FORMAT: 1.0</a:t>
             </a:r>
           </a:p>
-          <a:p>
-            <a:endParaRPr/>
-          </a:p>
+          <a:p/>
           <a:p>
             <a:r>
               <a:t>===BLOCK===</a:t>
@@ -604,9 +602,7 @@
               <a:t>{{BLOCK:IMAGE}}</a:t>
             </a:r>
           </a:p>
-          <a:p>
-            <a:endParaRPr/>
-          </a:p>
+          <a:p/>
           <a:p>
             <a:r>
               <a:t>export-image-mode: slide_with_rectpct</a:t>
@@ -622,45 +618,34 @@
               <a:t>export-image: extracted/figures/&lt;__BASEFILENAME__&gt;_slide&lt;__SLIDENUM__&gt;_fig.png</a:t>
             </a:r>
           </a:p>
-          <a:p>
-            <a:endParaRPr/>
-          </a:p>
-          <a:p>
-            <a:r>
-              <a:rPr lang="en-US"/>
+          <a:p/>
+          <a:p>
+            <a:r>
               <a:t>===BLOCK===</a:t>
             </a:r>
           </a:p>
           <a:p>
             <a:r>
-              <a:rPr lang="en-US"/>
               <a:t>{{BLOCK:IMAGE}}</a:t>
             </a:r>
           </a:p>
-          <a:p>
-            <a:endParaRPr lang="en-US"/>
-          </a:p>
-          <a:p>
-            <a:r>
-              <a:rPr lang="en-US"/>
+          <a:p/>
+          <a:p>
+            <a:r>
               <a:t>export-image-mode: slide_with_rectpct</a:t>
             </a:r>
           </a:p>
           <a:p>
             <a:r>
-              <a:rPr lang="en-US"/>
               <a:t>export-image-target: keyvisual</a:t>
             </a:r>
           </a:p>
           <a:p>
             <a:r>
-              <a:rPr lang="en-US"/>
               <a:t>export-image: extracted/figures/&lt;__BASEFILENAME__&gt;_keyvisual.png</a:t>
             </a:r>
           </a:p>
-          <a:p>
-            <a:endParaRPr lang="en-US"/>
-          </a:p>
+          <a:p/>
           <a:p>
             <a:r>
               <a:t>===BLOCK===</a:t>
@@ -671,9 +656,7 @@
               <a:t>{{BLOCK:MD:LONG}}</a:t>
             </a:r>
           </a:p>
-          <a:p>
-            <a:endParaRPr/>
-          </a:p>
+          <a:p/>
           <a:p>
             <a:r>
               <a:t>export-note: extracted/&lt;__BASEFILENAME__&gt;_slide&lt;__SLIDENUM__&gt;_md.md</a:t>
@@ -689,107 +672,64 @@
               <a:t>## &lt;__TITLE__&gt;</a:t>
             </a:r>
           </a:p>
-          <a:p>
-            <a:endParaRPr/>
-          </a:p>
+          <a:p/>
           <a:p>
             <a:r>
               <a:t>研修テキストのような資料を作るときは、配付資料にはすべての情報を載せず、講師用には載せておく、という2種類のテキストを作る必要があります。そこで使えるのが、指定したシェイプ（図形）をオプションにより自動削除する機能です。</a:t>
             </a:r>
           </a:p>
-          <a:p>
-            <a:endParaRPr/>
-          </a:p>
+          <a:p/>
           <a:p>
             <a:r>
               <a:t>配付資料には載せたくないシェイプに特殊マーカーを記入しておくと、マージ時に一括して消去する機能です。</a:t>
             </a:r>
           </a:p>
-          <a:p>
-            <a:endParaRPr/>
-          </a:p>
+          <a:p/>
           <a:p>
             <a:r>
               <a:t>結合指示書による on/off が可能で、起動時オプションでも設定できるので、講師用/受講者用の2種類を簡単に生成しわけられます。</a:t>
             </a:r>
           </a:p>
-          <a:p>
-            <a:endParaRPr/>
-          </a:p>
-          <a:p>
-            <a:r>
-              <a:t>```{=latex}</a:t>
-            </a:r>
-          </a:p>
-          <a:p>
-            <a:r>
-              <a:t>\par\vspace{1\baselineskip}</a:t>
-            </a:r>
-          </a:p>
-          <a:p>
-            <a:r>
-              <a:t>\begin{center}</a:t>
-            </a:r>
-          </a:p>
-          <a:p>
-            <a:r>
-              <a:t>```</a:t>
-            </a:r>
-          </a:p>
-          <a:p>
-            <a:endParaRPr/>
-          </a:p>
+          <a:p/>
+          <a:p>
+            <a:r>
+              <a:t>{{vspace:1}}</a:t>
+            </a:r>
+          </a:p>
+          <a:p/>
+          <a:p>
+            <a:r>
+              <a:t>::: {.center}</a:t>
+            </a:r>
+          </a:p>
+          <a:p/>
           <a:p>
             <a:r>
               <a:t>![](figures/&lt;__BASEFILENAME__&gt;_slide&lt;__SLIDENUM__&gt;_fig.png){ width=95% }</a:t>
             </a:r>
-            <a:endParaRPr lang="en-US"/>
-          </a:p>
-          <a:p>
-            <a:endParaRPr lang="en-US"/>
-          </a:p>
-          <a:p>
-            <a:r>
-              <a:rPr lang="en-US"/>
+          </a:p>
+          <a:p/>
+          <a:p>
+            <a:r>
               <a:t>![](figures/&lt;__BASEFILENAME__&gt;_keyvisual.png){ width=80% }</a:t>
             </a:r>
           </a:p>
-          <a:p>
-            <a:endParaRPr/>
-          </a:p>
-          <a:p>
-            <a:endParaRPr/>
-          </a:p>
-          <a:p>
-            <a:r>
-              <a:t>```{=latex}</a:t>
-            </a:r>
-          </a:p>
-          <a:p>
-            <a:r>
-              <a:t>\end{center}</a:t>
-            </a:r>
-          </a:p>
-          <a:p>
-            <a:r>
-              <a:t>\par\vspace{1\baselineskip}</a:t>
-            </a:r>
-          </a:p>
-          <a:p>
-            <a:r>
-              <a:t>```</a:t>
-            </a:r>
-            <a:endParaRPr lang="en-US"/>
-          </a:p>
-          <a:p>
-            <a:endParaRPr lang="en-US"/>
-          </a:p>
-          <a:p>
-            <a:endParaRPr lang="en-US"/>
-          </a:p>
-          <a:p>
-            <a:endParaRPr lang="en-US"/>
-          </a:p>
+          <a:p/>
+          <a:p/>
+          <a:p>
+            <a:r>
+              <a:t>:::</a:t>
+            </a:r>
+          </a:p>
+          <a:p/>
+          <a:p>
+            <a:r>
+              <a:t>{{vspace:1}}</a:t>
+            </a:r>
+          </a:p>
+          <a:p/>
+          <a:p/>
+          <a:p/>
         </p:txBody>
       </p:sp>
       <p:sp>
@@ -894,9 +834,7 @@
               <a:t>NOTE_CONTENT_FORMAT: 1.0</a:t>
             </a:r>
           </a:p>
-          <a:p>
-            <a:endParaRPr/>
-          </a:p>
+          <a:p/>
           <a:p>
             <a:r>
               <a:t>===BLOCK===</a:t>
@@ -907,9 +845,7 @@
               <a:t>{{BLOCK:IMAGE}}</a:t>
             </a:r>
           </a:p>
-          <a:p>
-            <a:endParaRPr/>
-          </a:p>
+          <a:p/>
           <a:p>
             <a:r>
               <a:t>export-image-mode: slide_with_rectpct</a:t>
@@ -925,9 +861,7 @@
               <a:t>export-image: extracted/figures/&lt;__BASEFILENAME__&gt;_slide&lt;__SLIDENUM__&gt;_fig.png</a:t>
             </a:r>
           </a:p>
-          <a:p>
-            <a:endParaRPr/>
-          </a:p>
+          <a:p/>
           <a:p>
             <a:r>
               <a:t>===BLOCK===</a:t>
@@ -938,9 +872,7 @@
               <a:t>{{BLOCK:MD:LONG}}</a:t>
             </a:r>
           </a:p>
-          <a:p>
-            <a:endParaRPr/>
-          </a:p>
+          <a:p/>
           <a:p>
             <a:r>
               <a:t>export-note: extracted/&lt;__BASEFILENAME__&gt;_slide&lt;__SLIDENUM__&gt;_md.md</a:t>
@@ -956,74 +888,46 @@
               <a:t>## &lt;__TITLE__&gt;</a:t>
             </a:r>
           </a:p>
-          <a:p>
-            <a:endParaRPr/>
-          </a:p>
+          <a:p/>
           <a:p>
             <a:r>
               <a:t>消去したいシェイプの一部に #CSP# というマーカーを含めておくと、 recipe yamlの indexer.deletecsp 設定 または --deletecsp オプションにより自動的に消去できます。</a:t>
             </a:r>
           </a:p>
-          <a:p>
-            <a:endParaRPr/>
-          </a:p>
+          <a:p/>
           <a:p>
             <a:r>
               <a:t>deletecsp がfalseまたは未指定の場合は、#CSP#マーカーだけが消去されます。</a:t>
             </a:r>
           </a:p>
-          <a:p>
-            <a:endParaRPr/>
-          </a:p>
-          <a:p>
-            <a:r>
-              <a:t>```{=latex}</a:t>
-            </a:r>
-          </a:p>
-          <a:p>
-            <a:r>
-              <a:t>\par\vspace{1\baselineskip}</a:t>
-            </a:r>
-          </a:p>
-          <a:p>
-            <a:r>
-              <a:t>\begin{center}</a:t>
-            </a:r>
-          </a:p>
-          <a:p>
-            <a:r>
-              <a:t>```</a:t>
-            </a:r>
-          </a:p>
-          <a:p>
-            <a:endParaRPr/>
-          </a:p>
+          <a:p/>
+          <a:p>
+            <a:r>
+              <a:t>{{vspace:1}}</a:t>
+            </a:r>
+          </a:p>
+          <a:p/>
+          <a:p>
+            <a:r>
+              <a:t>::: {.center}</a:t>
+            </a:r>
+          </a:p>
+          <a:p/>
           <a:p>
             <a:r>
               <a:t>![](figures/&lt;__BASEFILENAME__&gt;_slide&lt;__SLIDENUM__&gt;_fig.png){ width=95% }</a:t>
             </a:r>
           </a:p>
-          <a:p>
-            <a:endParaRPr/>
-          </a:p>
-          <a:p>
-            <a:r>
-              <a:t>```{=latex}</a:t>
-            </a:r>
-          </a:p>
-          <a:p>
-            <a:r>
-              <a:t>\end{center}</a:t>
-            </a:r>
-          </a:p>
-          <a:p>
-            <a:r>
-              <a:t>\par\vspace{1\baselineskip}</a:t>
-            </a:r>
-          </a:p>
-          <a:p>
-            <a:r>
-              <a:t>```</a:t>
+          <a:p/>
+          <a:p>
+            <a:r>
+              <a:t>:::</a:t>
+            </a:r>
+          </a:p>
+          <a:p/>
+          <a:p>
+            <a:r>
+              <a:t>{{vspace:1}}</a:t>
             </a:r>
           </a:p>
         </p:txBody>
@@ -1244,9 +1148,7 @@
               <a:t>NOTE_CONTENT_FORMAT: 1.0</a:t>
             </a:r>
           </a:p>
-          <a:p>
-            <a:endParaRPr/>
-          </a:p>
+          <a:p/>
           <a:p>
             <a:r>
               <a:t>===BLOCK===</a:t>
@@ -1257,9 +1159,7 @@
               <a:t>{{BLOCK:IMAGE}}</a:t>
             </a:r>
           </a:p>
-          <a:p>
-            <a:endParaRPr/>
-          </a:p>
+          <a:p/>
           <a:p>
             <a:r>
               <a:t>export-image-mode: slide_with_rectpct</a:t>
@@ -1275,9 +1175,7 @@
               <a:t>export-image: extracted/figures/&lt;__BASEFILENAME__&gt;_slide&lt;__SLIDENUM__&gt;_fig.png</a:t>
             </a:r>
           </a:p>
-          <a:p>
-            <a:endParaRPr/>
-          </a:p>
+          <a:p/>
           <a:p>
             <a:r>
               <a:t>===BLOCK===</a:t>
@@ -1288,9 +1186,7 @@
               <a:t>{{BLOCK:MD:LONG}}</a:t>
             </a:r>
           </a:p>
-          <a:p>
-            <a:endParaRPr/>
-          </a:p>
+          <a:p/>
           <a:p>
             <a:r>
               <a:t>export-note: extracted/&lt;__BASEFILENAME__&gt;_slide&lt;__SLIDENUM__&gt;_md.md</a:t>
@@ -1306,74 +1202,46 @@
               <a:t>## &lt;__TITLE__&gt;</a:t>
             </a:r>
           </a:p>
-          <a:p>
-            <a:endParaRPr/>
-          </a:p>
+          <a:p/>
           <a:p>
             <a:r>
               <a:t>CSPマーカーの基本的な利用イメージです。左側が原本ファイル、deletecsl 有効なマージ後は右側の状態になります。</a:t>
             </a:r>
           </a:p>
-          <a:p>
-            <a:endParaRPr/>
-          </a:p>
+          <a:p/>
           <a:p>
             <a:r>
               <a:t>グループ化したシェイプをまるごと削除するには 「グループ名」 にCSPマーカーを設定する必要があることに注意してください。</a:t>
             </a:r>
           </a:p>
-          <a:p>
-            <a:endParaRPr/>
-          </a:p>
-          <a:p>
-            <a:r>
-              <a:t>```{=latex}</a:t>
-            </a:r>
-          </a:p>
-          <a:p>
-            <a:r>
-              <a:t>\par\vspace{1\baselineskip}</a:t>
-            </a:r>
-          </a:p>
-          <a:p>
-            <a:r>
-              <a:t>\begin{center}</a:t>
-            </a:r>
-          </a:p>
-          <a:p>
-            <a:r>
-              <a:t>```</a:t>
-            </a:r>
-          </a:p>
-          <a:p>
-            <a:endParaRPr/>
-          </a:p>
+          <a:p/>
+          <a:p>
+            <a:r>
+              <a:t>{{vspace:1}}</a:t>
+            </a:r>
+          </a:p>
+          <a:p/>
+          <a:p>
+            <a:r>
+              <a:t>::: {.center}</a:t>
+            </a:r>
+          </a:p>
+          <a:p/>
           <a:p>
             <a:r>
               <a:t>![](figures/&lt;__BASEFILENAME__&gt;_slide&lt;__SLIDENUM__&gt;_fig.png){ width=95% }</a:t>
             </a:r>
           </a:p>
-          <a:p>
-            <a:endParaRPr/>
-          </a:p>
-          <a:p>
-            <a:r>
-              <a:t>```{=latex}</a:t>
-            </a:r>
-          </a:p>
-          <a:p>
-            <a:r>
-              <a:t>\end{center}</a:t>
-            </a:r>
-          </a:p>
-          <a:p>
-            <a:r>
-              <a:t>\par\vspace{1\baselineskip}</a:t>
-            </a:r>
-          </a:p>
-          <a:p>
-            <a:r>
-              <a:t>```</a:t>
+          <a:p/>
+          <a:p>
+            <a:r>
+              <a:t>:::</a:t>
+            </a:r>
+          </a:p>
+          <a:p/>
+          <a:p>
+            <a:r>
+              <a:t>{{vspace:1}}</a:t>
             </a:r>
           </a:p>
         </p:txBody>
@@ -1594,9 +1462,7 @@
               <a:t>NOTE_CONTENT_FORMAT: 1.0</a:t>
             </a:r>
           </a:p>
-          <a:p>
-            <a:endParaRPr/>
-          </a:p>
+          <a:p/>
           <a:p>
             <a:r>
               <a:t>===BLOCK===</a:t>
@@ -1607,9 +1473,7 @@
               <a:t>{{BLOCK:IMAGE}}</a:t>
             </a:r>
           </a:p>
-          <a:p>
-            <a:endParaRPr/>
-          </a:p>
+          <a:p/>
           <a:p>
             <a:r>
               <a:t>export-image-mode: slide_with_rectpct</a:t>
@@ -1625,9 +1489,7 @@
               <a:t>export-image: extracted/figures/&lt;__BASEFILENAME__&gt;_slide&lt;__SLIDENUM__&gt;_fig.png</a:t>
             </a:r>
           </a:p>
-          <a:p>
-            <a:endParaRPr/>
-          </a:p>
+          <a:p/>
           <a:p>
             <a:r>
               <a:t>===BLOCK===</a:t>
@@ -1638,9 +1500,7 @@
               <a:t>{{BLOCK:MD:LONG}}</a:t>
             </a:r>
           </a:p>
-          <a:p>
-            <a:endParaRPr/>
-          </a:p>
+          <a:p/>
           <a:p>
             <a:r>
               <a:t>export-note: extracted/&lt;__BASEFILENAME__&gt;_slide&lt;__SLIDENUM__&gt;_md.md</a:t>
@@ -1656,66 +1516,40 @@
               <a:t>## &lt;__TITLE__&gt;</a:t>
             </a:r>
           </a:p>
-          <a:p>
-            <a:endParaRPr/>
-          </a:p>
+          <a:p/>
           <a:p>
             <a:r>
               <a:t>テーブルセルに CSPマーカーがある場合は、テーブルごと消去されます。</a:t>
             </a:r>
           </a:p>
-          <a:p>
-            <a:endParaRPr/>
-          </a:p>
-          <a:p>
-            <a:r>
-              <a:t>```{=latex}</a:t>
-            </a:r>
-          </a:p>
-          <a:p>
-            <a:r>
-              <a:t>\par\vspace{1\baselineskip}</a:t>
-            </a:r>
-          </a:p>
-          <a:p>
-            <a:r>
-              <a:t>\begin{center}</a:t>
-            </a:r>
-          </a:p>
-          <a:p>
-            <a:r>
-              <a:t>```</a:t>
-            </a:r>
-          </a:p>
-          <a:p>
-            <a:endParaRPr/>
-          </a:p>
+          <a:p/>
+          <a:p>
+            <a:r>
+              <a:t>{{vspace:1}}</a:t>
+            </a:r>
+          </a:p>
+          <a:p/>
+          <a:p>
+            <a:r>
+              <a:t>::: {.center}</a:t>
+            </a:r>
+          </a:p>
+          <a:p/>
           <a:p>
             <a:r>
               <a:t>![](figures/&lt;__BASEFILENAME__&gt;_slide&lt;__SLIDENUM__&gt;_fig.png){ width=95% }</a:t>
             </a:r>
           </a:p>
-          <a:p>
-            <a:endParaRPr/>
-          </a:p>
-          <a:p>
-            <a:r>
-              <a:t>```{=latex}</a:t>
-            </a:r>
-          </a:p>
-          <a:p>
-            <a:r>
-              <a:t>\end{center}</a:t>
-            </a:r>
-          </a:p>
-          <a:p>
-            <a:r>
-              <a:t>\par\vspace{1\baselineskip}</a:t>
-            </a:r>
-          </a:p>
-          <a:p>
-            <a:r>
-              <a:t>```</a:t>
+          <a:p/>
+          <a:p>
+            <a:r>
+              <a:t>:::</a:t>
+            </a:r>
+          </a:p>
+          <a:p/>
+          <a:p>
+            <a:r>
+              <a:t>{{vspace:1}}</a:t>
             </a:r>
           </a:p>
         </p:txBody>
@@ -1828,9 +1662,7 @@
               <a:t>NOTE_CONTENT_FORMAT: 1.0</a:t>
             </a:r>
           </a:p>
-          <a:p>
-            <a:endParaRPr/>
-          </a:p>
+          <a:p/>
           <a:p>
             <a:r>
               <a:t>===BLOCK===</a:t>
@@ -1841,9 +1673,7 @@
               <a:t>{{BLOCK:IMAGE}}</a:t>
             </a:r>
           </a:p>
-          <a:p>
-            <a:endParaRPr/>
-          </a:p>
+          <a:p/>
           <a:p>
             <a:r>
               <a:t>export-image-mode: slide_with_rectpct</a:t>
@@ -1859,9 +1689,7 @@
               <a:t>export-image: extracted/figures/&lt;__BASEFILENAME__&gt;_slide&lt;__SLIDENUM__&gt;_fig.png</a:t>
             </a:r>
           </a:p>
-          <a:p>
-            <a:endParaRPr/>
-          </a:p>
+          <a:p/>
           <a:p>
             <a:r>
               <a:t>===BLOCK===</a:t>
@@ -1872,9 +1700,7 @@
               <a:t>{{BLOCK:MD:LONG}}</a:t>
             </a:r>
           </a:p>
-          <a:p>
-            <a:endParaRPr/>
-          </a:p>
+          <a:p/>
           <a:p>
             <a:r>
               <a:t>export-note: extracted/&lt;__BASEFILENAME__&gt;_slide&lt;__SLIDENUM__&gt;_md.md</a:t>
@@ -1890,66 +1716,40 @@
               <a:t>## &lt;__TITLE__&gt;</a:t>
             </a:r>
           </a:p>
-          <a:p>
-            <a:endParaRPr/>
-          </a:p>
+          <a:p/>
           <a:p>
             <a:r>
               <a:t>手書き記入用の穴埋め欄を作る場合など、　「シェイプは残して、文字列だけ消去したい」 場合は 「文字列」 を別シェイプで作って重ねてください。</a:t>
             </a:r>
           </a:p>
-          <a:p>
-            <a:endParaRPr/>
-          </a:p>
-          <a:p>
-            <a:r>
-              <a:t>```{=latex}</a:t>
-            </a:r>
-          </a:p>
-          <a:p>
-            <a:r>
-              <a:t>\par\vspace{1\baselineskip}</a:t>
-            </a:r>
-          </a:p>
-          <a:p>
-            <a:r>
-              <a:t>\begin{center}</a:t>
-            </a:r>
-          </a:p>
-          <a:p>
-            <a:r>
-              <a:t>```</a:t>
-            </a:r>
-          </a:p>
-          <a:p>
-            <a:endParaRPr/>
-          </a:p>
+          <a:p/>
+          <a:p>
+            <a:r>
+              <a:t>{{vspace:1}}</a:t>
+            </a:r>
+          </a:p>
+          <a:p/>
+          <a:p>
+            <a:r>
+              <a:t>::: {.center}</a:t>
+            </a:r>
+          </a:p>
+          <a:p/>
           <a:p>
             <a:r>
               <a:t>![](figures/&lt;__BASEFILENAME__&gt;_slide&lt;__SLIDENUM__&gt;_fig.png){ width=95% }</a:t>
             </a:r>
           </a:p>
-          <a:p>
-            <a:endParaRPr/>
-          </a:p>
-          <a:p>
-            <a:r>
-              <a:t>```{=latex}</a:t>
-            </a:r>
-          </a:p>
-          <a:p>
-            <a:r>
-              <a:t>\end{center}</a:t>
-            </a:r>
-          </a:p>
-          <a:p>
-            <a:r>
-              <a:t>\par\vspace{1\baselineskip}</a:t>
-            </a:r>
-          </a:p>
-          <a:p>
-            <a:r>
-              <a:t>```</a:t>
+          <a:p/>
+          <a:p>
+            <a:r>
+              <a:t>:::</a:t>
+            </a:r>
+          </a:p>
+          <a:p/>
+          <a:p>
+            <a:r>
+              <a:t>{{vspace:1}}</a:t>
             </a:r>
           </a:p>
         </p:txBody>
